--- a/Дударов.pptx
+++ b/Дударов.pptx
@@ -5,7 +5,7 @@
     <p:sldMasterId id="2147483659" r:id="rId1"/>
   </p:sldMasterIdLst>
   <p:notesMasterIdLst>
-    <p:notesMasterId r:id="rId9"/>
+    <p:notesMasterId r:id="rId10"/>
   </p:notesMasterIdLst>
   <p:sldIdLst>
     <p:sldId id="256" r:id="rId2"/>
@@ -13,25 +13,26 @@
     <p:sldId id="258" r:id="rId4"/>
     <p:sldId id="259" r:id="rId5"/>
     <p:sldId id="260" r:id="rId6"/>
-    <p:sldId id="261" r:id="rId7"/>
-    <p:sldId id="262" r:id="rId8"/>
+    <p:sldId id="263" r:id="rId7"/>
+    <p:sldId id="261" r:id="rId8"/>
+    <p:sldId id="262" r:id="rId9"/>
   </p:sldIdLst>
   <p:sldSz cx="9144000" cy="5143500" type="screen16x9"/>
   <p:notesSz cx="6858000" cy="9144000"/>
   <p:embeddedFontLst>
     <p:embeddedFont>
       <p:font typeface="Roboto" panose="02000000000000000000" pitchFamily="2" charset="0"/>
-      <p:regular r:id="rId10"/>
-      <p:bold r:id="rId11"/>
-      <p:italic r:id="rId12"/>
-      <p:boldItalic r:id="rId13"/>
+      <p:regular r:id="rId11"/>
+      <p:bold r:id="rId12"/>
+      <p:italic r:id="rId13"/>
+      <p:boldItalic r:id="rId14"/>
     </p:embeddedFont>
     <p:embeddedFont>
       <p:font typeface="Roboto Mono" panose="020B0604020202020204" charset="0"/>
-      <p:regular r:id="rId14"/>
-      <p:bold r:id="rId15"/>
-      <p:italic r:id="rId16"/>
-      <p:boldItalic r:id="rId17"/>
+      <p:regular r:id="rId15"/>
+      <p:bold r:id="rId16"/>
+      <p:italic r:id="rId17"/>
+      <p:boldItalic r:id="rId18"/>
     </p:embeddedFont>
   </p:embeddedFontLst>
   <p:defaultTextStyle>
@@ -1064,7 +1065,7 @@
         </p:nvSpPr>
         <p:spPr>
           <a:xfrm>
-            <a:off x="381300" y="685800"/>
+            <a:off x="381000" y="685800"/>
             <a:ext cx="6096000" cy="3429000"/>
           </a:xfrm>
           <a:custGeom>
@@ -1272,7 +1273,7 @@
         </p:nvSpPr>
         <p:spPr>
           <a:xfrm>
-            <a:off x="381300" y="685800"/>
+            <a:off x="381000" y="685800"/>
             <a:ext cx="6096000" cy="3429000"/>
           </a:xfrm>
           <a:custGeom>
@@ -1340,6 +1341,11 @@
         </p:txBody>
       </p:sp>
     </p:spTree>
+    <p:extLst>
+      <p:ext uri="{BB962C8B-B14F-4D97-AF65-F5344CB8AC3E}">
+        <p14:creationId xmlns:p14="http://schemas.microsoft.com/office/powerpoint/2010/main" val="1074981655"/>
+      </p:ext>
+    </p:extLst>
   </p:cSld>
   <p:clrMapOvr>
     <a:masterClrMapping/>
@@ -7538,7 +7544,7 @@
         </p:nvGraphicFramePr>
         <p:xfrm>
           <a:off x="427650" y="1085250"/>
-          <a:ext cx="3000000" cy="3000000"/>
+          <a:ext cx="8235250" cy="3447315"/>
         </p:xfrm>
         <a:graphic>
           <a:graphicData uri="http://schemas.openxmlformats.org/drawingml/2006/table">
@@ -8755,19 +8761,88 @@
 <file path=ppt/slides/slide6.xml><?xml version="1.0" encoding="utf-8"?>
 <p:sld xmlns:a="http://schemas.openxmlformats.org/drawingml/2006/main" xmlns:r="http://schemas.openxmlformats.org/officeDocument/2006/relationships" xmlns:p="http://schemas.openxmlformats.org/presentationml/2006/main">
   <p:cSld>
-    <p:bg>
-      <p:bgPr>
-        <a:blipFill>
-          <a:blip r:embed="rId3">
-            <a:alphaModFix/>
-          </a:blip>
-          <a:stretch>
-            <a:fillRect/>
-          </a:stretch>
-        </a:blipFill>
-        <a:effectLst/>
-      </p:bgPr>
-    </p:bg>
+    <p:spTree>
+      <p:nvGrpSpPr>
+        <p:cNvPr id="1" name=""/>
+        <p:cNvGrpSpPr/>
+        <p:nvPr/>
+      </p:nvGrpSpPr>
+      <p:grpSpPr>
+        <a:xfrm>
+          <a:off x="0" y="0"/>
+          <a:ext cx="0" cy="0"/>
+          <a:chOff x="0" y="0"/>
+          <a:chExt cx="0" cy="0"/>
+        </a:xfrm>
+      </p:grpSpPr>
+      <p:sp>
+        <p:nvSpPr>
+          <p:cNvPr id="2" name="Заголовок 1">
+            <a:extLst>
+              <a:ext uri="{FF2B5EF4-FFF2-40B4-BE49-F238E27FC236}">
+                <a16:creationId xmlns:a16="http://schemas.microsoft.com/office/drawing/2014/main" id="{5574D841-C501-4E98-9033-87C48271DDAF}"/>
+              </a:ext>
+            </a:extLst>
+          </p:cNvPr>
+          <p:cNvSpPr>
+            <a:spLocks noGrp="1"/>
+          </p:cNvSpPr>
+          <p:nvPr>
+            <p:ph type="title"/>
+          </p:nvPr>
+        </p:nvSpPr>
+        <p:spPr/>
+        <p:txBody>
+          <a:bodyPr>
+            <a:normAutofit fontScale="90000"/>
+          </a:bodyPr>
+          <a:lstStyle/>
+          <a:p>
+            <a:endParaRPr lang="ru-RU"/>
+          </a:p>
+        </p:txBody>
+      </p:sp>
+      <p:sp>
+        <p:nvSpPr>
+          <p:cNvPr id="3" name="Текст 2">
+            <a:extLst>
+              <a:ext uri="{FF2B5EF4-FFF2-40B4-BE49-F238E27FC236}">
+                <a16:creationId xmlns:a16="http://schemas.microsoft.com/office/drawing/2014/main" id="{DE840A46-6195-4F02-B23B-F55918F45DAF}"/>
+              </a:ext>
+            </a:extLst>
+          </p:cNvPr>
+          <p:cNvSpPr>
+            <a:spLocks noGrp="1"/>
+          </p:cNvSpPr>
+          <p:nvPr>
+            <p:ph type="body" idx="1"/>
+          </p:nvPr>
+        </p:nvSpPr>
+        <p:spPr/>
+        <p:txBody>
+          <a:bodyPr/>
+          <a:lstStyle/>
+          <a:p>
+            <a:endParaRPr lang="ru-RU"/>
+          </a:p>
+        </p:txBody>
+      </p:sp>
+    </p:spTree>
+    <p:extLst>
+      <p:ext uri="{BB962C8B-B14F-4D97-AF65-F5344CB8AC3E}">
+        <p14:creationId xmlns:p14="http://schemas.microsoft.com/office/powerpoint/2010/main" val="3561758856"/>
+      </p:ext>
+    </p:extLst>
+  </p:cSld>
+  <p:clrMapOvr>
+    <a:masterClrMapping/>
+  </p:clrMapOvr>
+</p:sld>
+</file>
+
+<file path=ppt/slides/slide7.xml><?xml version="1.0" encoding="utf-8"?>
+<p:sld xmlns:a="http://schemas.openxmlformats.org/drawingml/2006/main" xmlns:r="http://schemas.openxmlformats.org/officeDocument/2006/relationships" xmlns:p="http://schemas.openxmlformats.org/presentationml/2006/main">
+  <p:cSld>
     <p:spTree>
       <p:nvGrpSpPr>
         <p:cNvPr id="1" name="Shape 84"/>
@@ -8817,108 +8892,23 @@
               <a:buNone/>
             </a:pPr>
             <a:r>
+              <a:rPr lang="ru" dirty="0"/>
+              <a:t>Спасибо за </a:t>
+            </a:r>
+            <a:r>
               <a:rPr lang="ru"/>
-              <a:t>Спасибо за внимание :)</a:t>
+              <a:t>внимание </a:t>
             </a:r>
-            <a:endParaRPr/>
+            <a:endParaRPr dirty="0"/>
           </a:p>
         </p:txBody>
       </p:sp>
-      <p:sp>
-        <p:nvSpPr>
-          <p:cNvPr id="86" name="Google Shape;86;p18"/>
-          <p:cNvSpPr txBox="1">
-            <a:spLocks noGrp="1"/>
-          </p:cNvSpPr>
-          <p:nvPr>
-            <p:ph type="body" idx="1"/>
-          </p:nvPr>
-        </p:nvSpPr>
-        <p:spPr>
-          <a:xfrm>
-            <a:off x="311700" y="1152475"/>
-            <a:ext cx="8520600" cy="3416400"/>
-          </a:xfrm>
-          <a:prstGeom prst="rect">
-            <a:avLst/>
-          </a:prstGeom>
-        </p:spPr>
-        <p:txBody>
-          <a:bodyPr spcFirstLastPara="1" wrap="square" lIns="91425" tIns="91425" rIns="91425" bIns="91425" anchor="t" anchorCtr="0">
-            <a:normAutofit/>
-          </a:bodyPr>
-          <a:lstStyle/>
-          <a:p>
-            <a:pPr marL="0" lvl="0" indent="0" algn="l" rtl="0">
-              <a:spcBef>
-                <a:spcPts val="0"/>
-              </a:spcBef>
-              <a:spcAft>
-                <a:spcPts val="1200"/>
-              </a:spcAft>
-              <a:buNone/>
-            </a:pPr>
-            <a:endParaRPr/>
-          </a:p>
-        </p:txBody>
-      </p:sp>
-      <p:pic>
-        <p:nvPicPr>
-          <p:cNvPr id="87" name="Google Shape;87;p18" title="c5ea34f2a99bfdebf13988b597533229.jpg"/>
-          <p:cNvPicPr preferRelativeResize="0"/>
-          <p:nvPr/>
-        </p:nvPicPr>
-        <p:blipFill>
-          <a:blip r:embed="rId4">
-            <a:alphaModFix/>
-          </a:blip>
-          <a:stretch>
-            <a:fillRect/>
-          </a:stretch>
-        </p:blipFill>
-        <p:spPr>
-          <a:xfrm>
-            <a:off x="0" y="1152475"/>
-            <a:ext cx="3192814" cy="3991024"/>
-          </a:xfrm>
-          <a:prstGeom prst="rect">
-            <a:avLst/>
-          </a:prstGeom>
-          <a:noFill/>
-          <a:ln>
-            <a:noFill/>
-          </a:ln>
-        </p:spPr>
-      </p:pic>
-      <p:pic>
-        <p:nvPicPr>
-          <p:cNvPr id="88" name="Google Shape;88;p18" title="42b0baaa6f65321fd3c8bbefccb90816.jpg"/>
-          <p:cNvPicPr preferRelativeResize="0"/>
-          <p:nvPr/>
-        </p:nvPicPr>
-        <p:blipFill>
-          <a:blip r:embed="rId5">
-            <a:alphaModFix/>
-          </a:blip>
-          <a:stretch>
-            <a:fillRect/>
-          </a:stretch>
-        </p:blipFill>
-        <p:spPr>
-          <a:xfrm>
-            <a:off x="6476825" y="2476325"/>
-            <a:ext cx="2667176" cy="2667176"/>
-          </a:xfrm>
-          <a:prstGeom prst="rect">
-            <a:avLst/>
-          </a:prstGeom>
-          <a:noFill/>
-          <a:ln>
-            <a:noFill/>
-          </a:ln>
-        </p:spPr>
-      </p:pic>
     </p:spTree>
+    <p:extLst>
+      <p:ext uri="{BB962C8B-B14F-4D97-AF65-F5344CB8AC3E}">
+        <p14:creationId xmlns:p14="http://schemas.microsoft.com/office/powerpoint/2010/main" val="2648190752"/>
+      </p:ext>
+    </p:extLst>
   </p:cSld>
   <p:clrMapOvr>
     <a:masterClrMapping/>
@@ -8926,7 +8916,7 @@
 </p:sld>
 </file>
 
-<file path=ppt/slides/slide7.xml><?xml version="1.0" encoding="utf-8"?>
+<file path=ppt/slides/slide8.xml><?xml version="1.0" encoding="utf-8"?>
 <p:sld xmlns:a="http://schemas.openxmlformats.org/drawingml/2006/main" xmlns:r="http://schemas.openxmlformats.org/officeDocument/2006/relationships" xmlns:p="http://schemas.openxmlformats.org/presentationml/2006/main">
   <p:cSld>
     <p:spTree>
